--- a/backend/generated/pptx/classroom-2-item-12.pptx
+++ b/backend/generated/pptx/classroom-2-item-12.pptx
@@ -509,7 +509,7 @@
           <a:lstStyle/>
           <a:p>
             <a:r>
-              <a:t>强调‘单设备’是分布式能力的前提——只有稳定可靠的本地执行单元，才能参与跨设备协同。双模拟器验证并非模拟分布式通信，而是检验应用实例隔离性与环境一致性。</a:t>
+              <a:t>强调‘单设备是分布式的基础单元’，避免学生误以为分布式=多设备代码堆砌。用手机/手表/车机图标示意统一底座。</a:t>
             </a:r>
           </a:p>
         </p:txBody>
@@ -579,7 +579,7 @@
           <a:lstStyle/>
           <a:p>
             <a:r>
-              <a:t>特别提醒：模拟器必须使用不同设备类型或不同配置参数（如分辨率/内存），否则可能复用同一实例导致计数值同步——这正是我们要规避的‘非预期共享’现象。</a:t>
+              <a:t>类比HTML中&lt;html&gt;与&lt;div&gt;关系：@Entry是根节点，@Component是子树。展示DevEco Studio新建项目时自动生成的entry.ets结构。</a:t>
             </a:r>
           </a:p>
         </p:txBody>
@@ -649,7 +649,7 @@
           <a:lstStyle/>
           <a:p>
             <a:r>
-              <a:t>强调装饰器不是语法糖，而是编译期元信息注入点。@Entry触发Ability生命周期绑定，@Component触发UI组件实例化与渲染上下文创建。</a:t>
+              <a:t>用‘家庭账本’比喻：State是自家记账本（可写），Prop是邻居给的便签（只读）。演示修改Prop触发TS类型检查警告。</a:t>
             </a:r>
           </a:p>
         </p:txBody>
@@ -719,7 +719,7 @@
           <a:lstStyle/>
           <a:p>
             <a:r>
-              <a:t>State本质是响应式代理对象，其setter会通知UI框架脏检查；Prop则是编译期生成的只读访问器。二者协同构成‘单向数据流’雏形，这是分布式状态同步的设计前提。</a:t>
+              <a:t>对比Android Activity生命周期图，突出OpenHarmony‘页面-组件’二级生命周期设计。强调onPageShow对分布式服务发现的关键作用。</a:t>
             </a:r>
           </a:p>
         </p:txBody>
@@ -789,7 +789,7 @@
           <a:lstStyle/>
           <a:p>
             <a:r>
-              <a:t>生命周期方法是分布式场景下资源协调的关键锚点。例如onPageShow可触发设备发现，onPageHide可释放分布式Session。当前阶段虽未启用分布式API，但生命周期意识必须建立。</a:t>
+              <a:t>演示如何右键项目→‘Run on Multiple Devices’，并实时切换两台模拟器窗口。提醒学生截图必须包含两台设备时间戳与不同计数值。</a:t>
             </a:r>
           </a:p>
         </p:txBody>
@@ -3871,7 +3871,7 @@
           <a:lstStyle/>
           <a:p>
             <a:r>
-              <a:t>课程导览与学习目标</a:t>
+              <a:t>为什么从OpenHarmony开始学分布式系统？</a:t>
             </a:r>
           </a:p>
         </p:txBody>
@@ -3895,7 +3895,7 @@
               <a:defRPr sz="2200"/>
             </a:pPr>
             <a:r>
-              <a:t>本课定位：OpenHarmony分布式应用开发的第一步——单设备可运行基础工程</a:t>
+              <a:t>OpenHarmony是首个由国内主导、全球协作的开源泛终端操作系统</a:t>
             </a:r>
           </a:p>
           <a:p>
@@ -3903,7 +3903,7 @@
               <a:defRPr sz="2200"/>
             </a:pPr>
             <a:r>
-              <a:t>核心能力目标：环境搭建 → 代码编写 → 编译部署 → 双模拟器验证</a:t>
+              <a:t>其‘一次开发、多端部署’理念直指分布式协同本质</a:t>
             </a:r>
           </a:p>
           <a:p>
@@ -3911,7 +3911,7 @@
               <a:defRPr sz="2200"/>
             </a:pPr>
             <a:r>
-              <a:t>交付物：可运行ArkTS工程包 + 双模拟器截图（不同初始计数值）</a:t>
+              <a:t>ArkTS作为首选语言，融合TypeScript安全性和声明式UI表达力</a:t>
             </a:r>
           </a:p>
           <a:p>
@@ -3919,7 +3919,7 @@
               <a:defRPr sz="2200"/>
             </a:pPr>
             <a:r>
-              <a:t>前置要求：已安装DevEco Studio 4.1+、OpenHarmony SDK 4.0.1.2+</a:t>
+              <a:t>本课不跳过‘单设备’——它是理解分布式能力的前提锚点</a:t>
             </a:r>
           </a:p>
         </p:txBody>
@@ -3958,7 +3958,7 @@
           <a:lstStyle/>
           <a:p>
             <a:r>
-              <a:t>DevEco Studio 环境配置关键步骤</a:t>
+              <a:t>@Entry与@Component：组件化世界的门禁卡</a:t>
             </a:r>
           </a:p>
         </p:txBody>
@@ -3982,7 +3982,7 @@
               <a:defRPr sz="2200"/>
             </a:pPr>
             <a:r>
-              <a:t>安装DevEco Studio（推荐4.1 Release版本）</a:t>
+              <a:t>@Entry标记应用入口组件，每个模块有且仅有一个</a:t>
             </a:r>
           </a:p>
           <a:p>
@@ -3990,7 +3990,7 @@
               <a:defRPr sz="2200"/>
             </a:pPr>
             <a:r>
-              <a:t>配置SDK：选择API Version 9（Stage模型）、OpenHarmony SDK 4.0.1.2</a:t>
+              <a:t>@Component定义可复用UI单元，支持嵌套与组合</a:t>
             </a:r>
           </a:p>
           <a:p>
@@ -3998,7 +3998,7 @@
               <a:defRPr sz="2200"/>
             </a:pPr>
             <a:r>
-              <a:t>创建模拟器：至少配置2台独立设备（如'Phone'和'Tablet'），启用'Allow multiple instances'</a:t>
+              <a:t>二者共同构成ArkTS的‘声明式树状结构’骨架</a:t>
             </a:r>
           </a:p>
           <a:p>
@@ -4006,7 +4006,7 @@
               <a:defRPr sz="2200"/>
             </a:pPr>
             <a:r>
-              <a:t>验证：启动模拟器后，Device Manager中显示两个不同UDID的在线设备</a:t>
+              <a:t>错误示例：多个@Entry导致编译失败；@Component缺失render()报错</a:t>
             </a:r>
           </a:p>
         </p:txBody>
@@ -4045,7 +4045,7 @@
           <a:lstStyle/>
           <a:p>
             <a:r>
-              <a:t>@Entry 与 @Component：声明式UI的入口契约</a:t>
+              <a:t>State vs Prop：谁该拥有数据？</a:t>
             </a:r>
           </a:p>
         </p:txBody>
@@ -4069,7 +4069,7 @@
               <a:defRPr sz="2200"/>
             </a:pPr>
             <a:r>
-              <a:t>@Entry：标记应用主页面入口组件，每个模块仅允许一个@Entry</a:t>
+              <a:t>State：组件内部私有状态，变更触发UI重绘（如count）</a:t>
             </a:r>
           </a:p>
           <a:p>
@@ -4077,7 +4077,7 @@
               <a:defRPr sz="2200"/>
             </a:pPr>
             <a:r>
-              <a:t>@Component：定义可复用UI单元，支持嵌套与组合</a:t>
+              <a:t>Prop：父组件传入的只读属性，不可直接修改（如titleText）</a:t>
             </a:r>
           </a:p>
           <a:p>
@@ -4085,7 +4085,7 @@
               <a:defRPr sz="2200"/>
             </a:pPr>
             <a:r>
-              <a:t>二者均需配合build()函数返回UI描述树</a:t>
+              <a:t>双向绑定需通过事件回调实现（onTap → updateCount）</a:t>
             </a:r>
           </a:p>
           <a:p>
@@ -4093,7 +4093,7 @@
               <a:defRPr sz="2200"/>
             </a:pPr>
             <a:r>
-              <a:t>错误示例：@Entry类中直接return new MyComponent() → 必须通过@Component声明并由@Entry引用</a:t>
+              <a:t>反模式：在子组件中直接this.prop = xxx —— 编译期报错</a:t>
             </a:r>
           </a:p>
         </p:txBody>
@@ -4132,7 +4132,7 @@
           <a:lstStyle/>
           <a:p>
             <a:r>
-              <a:t>State 与 Prop：响应式状态管理双模式</a:t>
+              <a:t>UI组件生命周期：不只是onCreate/onDestroy</a:t>
             </a:r>
           </a:p>
         </p:txBody>
@@ -4156,7 +4156,7 @@
               <a:defRPr sz="2200"/>
             </a:pPr>
             <a:r>
-              <a:t>State：内部可变状态，变更触发组件重渲染（@Builder内不可用）</a:t>
+              <a:t>onPageShow/onPageHide：页面级可见性事件（对应前台/后台）</a:t>
             </a:r>
           </a:p>
           <a:p>
@@ -4164,7 +4164,7 @@
               <a:defRPr sz="2200"/>
             </a:pPr>
             <a:r>
-              <a:t>Prop：只读属性，用于父子组件间数据传递（需配合@BuilderParam或@Component参数声明）</a:t>
+              <a:t>onBackPress：拦截返回键，支持分布式场景中断操作</a:t>
             </a:r>
           </a:p>
           <a:p>
@@ -4172,7 +4172,7 @@
               <a:defRPr sz="2200"/>
             </a:pPr>
             <a:r>
-              <a:t>典型组合：父组件用State管理计数值，子组件用Prop接收并显示</a:t>
+              <a:t>aboutToAppear/aboutToDisappear：组件级挂载/卸载钩子</a:t>
             </a:r>
           </a:p>
           <a:p>
@@ -4180,7 +4180,7 @@
               <a:defRPr sz="2200"/>
             </a:pPr>
             <a:r>
-              <a:t>陷阱警示：直接修改Prop会触发运行时警告，且不触发重渲染</a:t>
+              <a:t>关键区别：onPageShow在模拟器热重载时不触发，而aboutToAppear会</a:t>
             </a:r>
           </a:p>
         </p:txBody>
@@ -4219,7 +4219,7 @@
           <a:lstStyle/>
           <a:p>
             <a:r>
-              <a:t>UI组件生命周期与双模拟器验证要点</a:t>
+              <a:t>双模拟器调试：让‘分布式’从第一天就可见</a:t>
             </a:r>
           </a:p>
         </p:txBody>
@@ -4243,7 +4243,7 @@
               <a:defRPr sz="2200"/>
             </a:pPr>
             <a:r>
-              <a:t>onPageShow/onPageHide：页面级可见性回调（对应Ability.onForeground/onBackground）</a:t>
+              <a:t>DevEco Studio支持同时启动Phone + Tablet/Watch模拟器</a:t>
             </a:r>
           </a:p>
           <a:p>
@@ -4251,7 +4251,7 @@
               <a:defRPr sz="2200"/>
             </a:pPr>
             <a:r>
-              <a:t>onReady：组件首次渲染完成后的钩子（适合初始化逻辑）</a:t>
+              <a:t>需在‘Run Configurations’中勾选‘Launch on multiple devices’</a:t>
             </a:r>
           </a:p>
           <a:p>
@@ -4259,7 +4259,7 @@
               <a:defRPr sz="2200"/>
             </a:pPr>
             <a:r>
-              <a:t>双模拟器验证重点：确认两实例独立运行 → 检查console日志时间戳、计数值初始值、点击事件是否互不影响</a:t>
+              <a:t>同一应用包自动部署到所有选中设备，进程隔离但共享HAP签名</a:t>
             </a:r>
           </a:p>
           <a:p>
@@ -4267,7 +4267,7 @@
               <a:defRPr sz="2200"/>
             </a:pPr>
             <a:r>
-              <a:t>调试技巧：在onPageShow中打印deviceName + Date.now()，截图对比差异</a:t>
+              <a:t>验证技巧：为不同设备设置不同初始count值（如Phone=0, Watch=100）</a:t>
             </a:r>
           </a:p>
         </p:txBody>
@@ -4338,7 +4338,7 @@
               <a:defRPr sz="1800"/>
             </a:pPr>
             <a:r>
-              <a:t>1. 在ArkTS中，以下哪项关于@Entry装饰器的描述是正确的？</a:t>
+              <a:t>1. 以下哪项是@Entry装饰器的强制约束？</a:t>
             </a:r>
           </a:p>
           <a:p>
@@ -4346,15 +4346,7 @@
               <a:defRPr sz="1800"/>
             </a:pPr>
             <a:r>
-              <a:t>2. 当父组件通过Prop向子组件传递计数值count: number时，子组件中以下哪种操作会导致运行时警告且无法触发UI更新？</a:t>
-            </a:r>
-          </a:p>
-          <a:p>
-            <a:pPr>
-              <a:defRPr sz="1800"/>
-            </a:pPr>
-            <a:r>
-              <a:t>3. 在双模拟器环境中，若两台模拟器上运行的同一ArkTS应用显示完全相同的初始计数值（如均为0），最可能的原因是？</a:t>
+              <a:t>2. 在aboutToAppear中执行this.count = deviceManager.getDeviceId().length，会导致什么结果？</a:t>
             </a:r>
           </a:p>
         </p:txBody>
@@ -4393,7 +4385,7 @@
           <a:lstStyle/>
           <a:p>
             <a:r>
-              <a:t>构建双实例独立计数器：ArkTS单设备基础工程</a:t>
+              <a:t>计数器增强：支持设备类型标识</a:t>
             </a:r>
           </a:p>
         </p:txBody>
@@ -4425,7 +4417,7 @@
               <a:defRPr sz="1800"/>
             </a:pPr>
             <a:r>
-              <a:t>1. 在DevEco Studio中创建新项目：选择'Empty Ability'模板，API Version设为9，语言选ArkTS</a:t>
+              <a:t>1. 修改UI，增加Text组件显示当前设备类型（Phone/Tablet/Watch）</a:t>
             </a:r>
           </a:p>
           <a:p>
@@ -4433,7 +4425,7 @@
               <a:defRPr sz="1800"/>
             </a:pPr>
             <a:r>
-              <a:t>2. 修改entry/src/main/ets/pages/Index.ets：使用@Entry/@Component声明主页面，添加State声明count: number = Math.floor(Math.random() * 10)</a:t>
+              <a:t>2. 使用deviceManager.getDeviceType()获取类型枚举</a:t>
             </a:r>
           </a:p>
           <a:p>
@@ -4441,7 +4433,7 @@
               <a:defRPr sz="1800"/>
             </a:pPr>
             <a:r>
-              <a:t>3. 在build()中放置Column容器，内含Text显示count值、Button绑定onClick事件（count++）</a:t>
+              <a:t>3. 在aboutToAppear中完成类型识别与UI绑定</a:t>
             </a:r>
           </a:p>
           <a:p>
@@ -4449,15 +4441,7 @@
               <a:defRPr sz="1800"/>
             </a:pPr>
             <a:r>
-              <a:t>4. 配置双模拟器：Device Manager中启动两台不同型号模拟器（如Phone API9 + Tablet API9）</a:t>
-            </a:r>
-          </a:p>
-          <a:p>
-            <a:pPr>
-              <a:defRPr sz="1800"/>
-            </a:pPr>
-            <a:r>
-              <a:t>5. 分别对两台模拟器执行'Run on Device'，截取各自界面，确认初始count值不同且点击后仅本地递增</a:t>
+              <a:t>4. 验证双模拟器启动后，Text内容与设备型号一致</a:t>
             </a:r>
           </a:p>
         </p:txBody>
